--- a/report/HazardBot_개발완료보고서_2026-09-01.pptx
+++ b/report/HazardBot_개발완료보고서_2026-09-01.pptx
@@ -32693,7 +32693,7 @@
                 <a:cs typeface="Pretendard"/>
                 <a:ea typeface="Pretendard"/>
               </a:rPr>
-              <a:t>2026-06-01부터 08-31까지 13주 · 기술적 선후관계로 순서를 정하고 역할을 나눴다</a:t>
+              <a:t>2026-06-01부터 08-31까지 13주로 만들고, 9/1~9/3 사흘로 제출물을 냈다 — 순서는 기술적 선후관계로 정했다</a:t>
             </a:r>
           </a:p>
         </p:txBody>
@@ -33433,7 +33433,7 @@
                 <a:cs typeface="Pretendard SemiBold"/>
                 <a:ea typeface="Pretendard SemiBold"/>
               </a:rPr>
-              <a:t>개발 일정 — 2026-06-01 ~ 08-31 · 13주</a:t>
+              <a:t>개발 일정 — 2026-06-01 ~ 09-03 · 13주 + 제출 3일</a:t>
             </a:r>
           </a:p>
         </p:txBody>
@@ -33446,7 +33446,7 @@
         </p:nvSpPr>
         <p:spPr>
           <a:xfrm>
-            <a:off x="914400" y="2324100"/>
+            <a:off x="914400" y="2314575"/>
             <a:ext cx="28575" cy="419100"/>
           </a:xfrm>
           <a:prstGeom prst="rect">
@@ -33489,7 +33489,7 @@
         <p:spPr>
           <a:xfrm>
             <a:off x="1066800" y="2209800"/>
-            <a:ext cx="800100" cy="647700"/>
+            <a:ext cx="800100" cy="628650"/>
           </a:xfrm>
           <a:prstGeom prst="rect">
             <a:avLst/>
@@ -33557,7 +33557,7 @@
         <p:spPr>
           <a:xfrm>
             <a:off x="1943100" y="2209800"/>
-            <a:ext cx="3886200" cy="647700"/>
+            <a:ext cx="3886200" cy="628650"/>
           </a:xfrm>
           <a:prstGeom prst="rect">
             <a:avLst/>
@@ -33600,7 +33600,7 @@
         </p:nvSpPr>
         <p:spPr>
           <a:xfrm>
-            <a:off x="914400" y="2852738"/>
+            <a:off x="914400" y="2833688"/>
             <a:ext cx="4914900" cy="9525"/>
           </a:xfrm>
           <a:prstGeom prst="rect">
@@ -33642,7 +33642,7 @@
         </p:nvSpPr>
         <p:spPr>
           <a:xfrm>
-            <a:off x="914400" y="2971800"/>
+            <a:off x="914400" y="2943225"/>
             <a:ext cx="28575" cy="419100"/>
           </a:xfrm>
           <a:prstGeom prst="rect">
@@ -33684,8 +33684,8 @@
         </p:nvSpPr>
         <p:spPr>
           <a:xfrm>
-            <a:off x="1066800" y="2857500"/>
-            <a:ext cx="800100" cy="647700"/>
+            <a:off x="1066800" y="2838450"/>
+            <a:ext cx="800100" cy="628650"/>
           </a:xfrm>
           <a:prstGeom prst="rect">
             <a:avLst/>
@@ -33752,8 +33752,8 @@
         </p:nvSpPr>
         <p:spPr>
           <a:xfrm>
-            <a:off x="1943100" y="2857500"/>
-            <a:ext cx="3886200" cy="647700"/>
+            <a:off x="1943100" y="2838450"/>
+            <a:ext cx="3886200" cy="628650"/>
           </a:xfrm>
           <a:prstGeom prst="rect">
             <a:avLst/>
@@ -33796,7 +33796,7 @@
         </p:nvSpPr>
         <p:spPr>
           <a:xfrm>
-            <a:off x="914400" y="3500438"/>
+            <a:off x="914400" y="3462338"/>
             <a:ext cx="4914900" cy="9525"/>
           </a:xfrm>
           <a:prstGeom prst="rect">
@@ -33838,7 +33838,7 @@
         </p:nvSpPr>
         <p:spPr>
           <a:xfrm>
-            <a:off x="914400" y="3619500"/>
+            <a:off x="914400" y="3571875"/>
             <a:ext cx="28575" cy="419100"/>
           </a:xfrm>
           <a:prstGeom prst="rect">
@@ -33880,8 +33880,8 @@
         </p:nvSpPr>
         <p:spPr>
           <a:xfrm>
-            <a:off x="1066800" y="3505200"/>
-            <a:ext cx="800100" cy="647700"/>
+            <a:off x="1066800" y="3467100"/>
+            <a:ext cx="800100" cy="628650"/>
           </a:xfrm>
           <a:prstGeom prst="rect">
             <a:avLst/>
@@ -33948,8 +33948,8 @@
         </p:nvSpPr>
         <p:spPr>
           <a:xfrm>
-            <a:off x="1943100" y="3505200"/>
-            <a:ext cx="3886200" cy="647700"/>
+            <a:off x="1943100" y="3467100"/>
+            <a:ext cx="3886200" cy="628650"/>
           </a:xfrm>
           <a:prstGeom prst="rect">
             <a:avLst/>
@@ -33992,7 +33992,7 @@
         </p:nvSpPr>
         <p:spPr>
           <a:xfrm>
-            <a:off x="914400" y="4148138"/>
+            <a:off x="914400" y="4090988"/>
             <a:ext cx="4914900" cy="9525"/>
           </a:xfrm>
           <a:prstGeom prst="rect">
@@ -34034,8 +34034,162 @@
         </p:nvSpPr>
         <p:spPr>
           <a:xfrm>
-            <a:off x="914400" y="4267200"/>
+            <a:off x="914400" y="4200525"/>
             <a:ext cx="28575" cy="419100"/>
+          </a:xfrm>
+          <a:prstGeom prst="rect">
+            <a:avLst/>
+          </a:prstGeom>
+          <a:solidFill>
+            <a:srgbClr val="0066CC"/>
+          </a:solidFill>
+          <a:ln>
+            <a:noFill/>
+          </a:ln>
+          <a:effectLst/>
+        </p:spPr>
+        <p:style>
+          <a:lnRef idx="1">
+            <a:schemeClr val="accent1"/>
+          </a:lnRef>
+          <a:fillRef idx="3">
+            <a:schemeClr val="accent1"/>
+          </a:fillRef>
+          <a:effectRef idx="2">
+            <a:schemeClr val="accent1"/>
+          </a:effectRef>
+          <a:fontRef idx="minor">
+            <a:schemeClr val="lt1"/>
+          </a:fontRef>
+        </p:style>
+        <p:txBody>
+          <a:bodyPr rtlCol="0" anchor="ctr"/>
+          <a:lstStyle/>
+          <a:p/>
+        </p:txBody>
+      </p:sp>
+      <p:sp>
+        <p:nvSpPr>
+          <p:cNvPr id="38" name="TextBox 37"/>
+          <p:cNvSpPr txBox="1"/>
+          <p:nvPr/>
+        </p:nvSpPr>
+        <p:spPr>
+          <a:xfrm>
+            <a:off x="1066800" y="4095750"/>
+            <a:ext cx="800100" cy="628650"/>
+          </a:xfrm>
+          <a:prstGeom prst="rect">
+            <a:avLst/>
+          </a:prstGeom>
+          <a:noFill/>
+        </p:spPr>
+        <p:txBody>
+          <a:bodyPr wrap="none" lIns="0" rIns="0" tIns="0" bIns="0" anchor="ctr">
+            <a:noAutofit/>
+          </a:bodyPr>
+          <a:lstStyle/>
+          <a:p>
+            <a:pPr algn="l">
+              <a:lnSpc>
+                <a:spcPts val="1657"/>
+              </a:lnSpc>
+              <a:spcAft>
+                <a:spcPts val="0"/>
+              </a:spcAft>
+            </a:pPr>
+            <a:r>
+              <a:rPr b="1" sz="1275" spc="-26" kern="0">
+                <a:solidFill>
+                  <a:srgbClr val="1D1D1F"/>
+                </a:solidFill>
+                <a:latin typeface="Pretendard"/>
+                <a:cs typeface="Pretendard"/>
+                <a:ea typeface="Pretendard"/>
+              </a:rPr>
+              <a:t>9월</a:t>
+            </a:r>
+          </a:p>
+          <a:p>
+            <a:pPr algn="l">
+              <a:lnSpc>
+                <a:spcPts val="1072"/>
+              </a:lnSpc>
+              <a:spcBef>
+                <a:spcPts val="150"/>
+              </a:spcBef>
+              <a:spcAft>
+                <a:spcPts val="0"/>
+              </a:spcAft>
+            </a:pPr>
+            <a:r>
+              <a:rPr b="0" sz="825" spc="0" kern="0">
+                <a:solidFill>
+                  <a:srgbClr val="7A7A7A"/>
+                </a:solidFill>
+                <a:latin typeface="Pretendard"/>
+                <a:cs typeface="Pretendard"/>
+                <a:ea typeface="Pretendard"/>
+              </a:rPr>
+              <a:t>W14</a:t>
+            </a:r>
+          </a:p>
+        </p:txBody>
+      </p:sp>
+      <p:sp>
+        <p:nvSpPr>
+          <p:cNvPr id="39" name="TextBox 38"/>
+          <p:cNvSpPr txBox="1"/>
+          <p:nvPr/>
+        </p:nvSpPr>
+        <p:spPr>
+          <a:xfrm>
+            <a:off x="1943100" y="4095750"/>
+            <a:ext cx="3886200" cy="628650"/>
+          </a:xfrm>
+          <a:prstGeom prst="rect">
+            <a:avLst/>
+          </a:prstGeom>
+          <a:noFill/>
+        </p:spPr>
+        <p:txBody>
+          <a:bodyPr wrap="square" lIns="0" rIns="0" tIns="0" bIns="0" anchor="ctr">
+            <a:noAutofit/>
+          </a:bodyPr>
+          <a:lstStyle/>
+          <a:p>
+            <a:pPr algn="l">
+              <a:lnSpc>
+                <a:spcPts val="1237"/>
+              </a:lnSpc>
+              <a:spcAft>
+                <a:spcPts val="0"/>
+              </a:spcAft>
+            </a:pPr>
+            <a:r>
+              <a:rPr b="0" sz="825" spc="0" kern="0">
+                <a:solidFill>
+                  <a:srgbClr val="333333"/>
+                </a:solidFill>
+                <a:latin typeface="Pretendard"/>
+                <a:cs typeface="Pretendard"/>
+                <a:ea typeface="Pretendard"/>
+              </a:rPr>
+              <a:t>대회 양식 반영 → 필수항목 7개로 보고서 재구성 → 저장소 정본화 · 자격증명 정리 → 영상 자료 · 파일 구성</a:t>
+            </a:r>
+          </a:p>
+        </p:txBody>
+      </p:sp>
+      <p:sp>
+        <p:nvSpPr>
+          <p:cNvPr id="40" name="Rectangle 39"/>
+          <p:cNvSpPr/>
+          <p:nvPr/>
+        </p:nvSpPr>
+        <p:spPr>
+          <a:xfrm>
+            <a:off x="914400" y="4762500"/>
+            <a:ext cx="4914900" cy="9525"/>
           </a:xfrm>
           <a:prstGeom prst="rect">
             <a:avLst/>
@@ -34070,14 +34224,58 @@
       </p:sp>
       <p:sp>
         <p:nvSpPr>
-          <p:cNvPr id="38" name="TextBox 37"/>
+          <p:cNvPr id="41" name="TextBox 40"/>
           <p:cNvSpPr txBox="1"/>
           <p:nvPr/>
         </p:nvSpPr>
         <p:spPr>
           <a:xfrm>
-            <a:off x="1066800" y="4152900"/>
-            <a:ext cx="800100" cy="647700"/>
+            <a:off x="914400" y="4867275"/>
+            <a:ext cx="4914900" cy="165735"/>
+          </a:xfrm>
+          <a:prstGeom prst="rect">
+            <a:avLst/>
+          </a:prstGeom>
+          <a:noFill/>
+        </p:spPr>
+        <p:txBody>
+          <a:bodyPr wrap="none" lIns="0" rIns="0" tIns="0" bIns="0" anchor="t">
+            <a:noAutofit/>
+          </a:bodyPr>
+          <a:lstStyle/>
+          <a:p>
+            <a:pPr algn="l">
+              <a:lnSpc>
+                <a:spcPts val="1155"/>
+              </a:lnSpc>
+              <a:spcAft>
+                <a:spcPts val="0"/>
+              </a:spcAft>
+            </a:pPr>
+            <a:r>
+              <a:rPr b="0" sz="825" spc="50" kern="0">
+                <a:solidFill>
+                  <a:srgbClr val="7A7A7A"/>
+                </a:solidFill>
+                <a:latin typeface="Pretendard SemiBold"/>
+                <a:cs typeface="Pretendard SemiBold"/>
+                <a:ea typeface="Pretendard SemiBold"/>
+              </a:rPr>
+              <a:t>마일스톤</a:t>
+            </a:r>
+          </a:p>
+        </p:txBody>
+      </p:sp>
+      <p:sp>
+        <p:nvSpPr>
+          <p:cNvPr id="42" name="TextBox 41"/>
+          <p:cNvSpPr txBox="1"/>
+          <p:nvPr/>
+        </p:nvSpPr>
+        <p:spPr>
+          <a:xfrm>
+            <a:off x="914400" y="5076825"/>
+            <a:ext cx="571500" cy="228600"/>
           </a:xfrm>
           <a:prstGeom prst="rect">
             <a:avLst/>
@@ -34092,60 +34290,256 @@
           <a:p>
             <a:pPr algn="l">
               <a:lnSpc>
-                <a:spcPts val="1657"/>
-              </a:lnSpc>
-              <a:spcAft>
-                <a:spcPts val="0"/>
-              </a:spcAft>
-            </a:pPr>
-            <a:r>
-              <a:rPr b="1" sz="1275" spc="-26" kern="0">
-                <a:solidFill>
-                  <a:srgbClr val="1D1D1F"/>
+                <a:spcPts val="1170"/>
+              </a:lnSpc>
+              <a:spcAft>
+                <a:spcPts val="0"/>
+              </a:spcAft>
+            </a:pPr>
+            <a:r>
+              <a:rPr b="0" sz="900" spc="0" kern="0">
+                <a:solidFill>
+                  <a:srgbClr val="7A7A7A"/>
+                </a:solidFill>
+                <a:latin typeface="Pretendard SemiBold"/>
+                <a:cs typeface="Pretendard SemiBold"/>
+                <a:ea typeface="Pretendard SemiBold"/>
+              </a:rPr>
+              <a:t>07/11</a:t>
+            </a:r>
+          </a:p>
+        </p:txBody>
+      </p:sp>
+      <p:sp>
+        <p:nvSpPr>
+          <p:cNvPr id="43" name="TextBox 42"/>
+          <p:cNvSpPr txBox="1"/>
+          <p:nvPr/>
+        </p:nvSpPr>
+        <p:spPr>
+          <a:xfrm>
+            <a:off x="1562100" y="5076825"/>
+            <a:ext cx="4267200" cy="228600"/>
+          </a:xfrm>
+          <a:prstGeom prst="rect">
+            <a:avLst/>
+          </a:prstGeom>
+          <a:noFill/>
+        </p:spPr>
+        <p:txBody>
+          <a:bodyPr wrap="none" lIns="0" rIns="0" tIns="0" bIns="0" anchor="ctr">
+            <a:noAutofit/>
+          </a:bodyPr>
+          <a:lstStyle/>
+          <a:p>
+            <a:pPr algn="l">
+              <a:lnSpc>
+                <a:spcPts val="1170"/>
+              </a:lnSpc>
+              <a:spcAft>
+                <a:spcPts val="0"/>
+              </a:spcAft>
+            </a:pPr>
+            <a:r>
+              <a:rPr b="0" sz="900" spc="0" kern="0">
+                <a:solidFill>
+                  <a:srgbClr val="333333"/>
                 </a:solidFill>
                 <a:latin typeface="Pretendard"/>
                 <a:cs typeface="Pretendard"/>
                 <a:ea typeface="Pretendard"/>
               </a:rPr>
-              <a:t>9월</a:t>
-            </a:r>
-          </a:p>
-          <a:p>
-            <a:pPr algn="l">
-              <a:lnSpc>
-                <a:spcPts val="1072"/>
-              </a:lnSpc>
-              <a:spcBef>
-                <a:spcPts val="150"/>
-              </a:spcBef>
-              <a:spcAft>
-                <a:spcPts val="0"/>
-              </a:spcAft>
-            </a:pPr>
-            <a:r>
-              <a:rPr b="0" sz="825" spc="0" kern="0">
+              <a:t>캘리브레이션 정본 4종 확정</a:t>
+            </a:r>
+          </a:p>
+        </p:txBody>
+      </p:sp>
+      <p:sp>
+        <p:nvSpPr>
+          <p:cNvPr id="44" name="TextBox 43"/>
+          <p:cNvSpPr txBox="1"/>
+          <p:nvPr/>
+        </p:nvSpPr>
+        <p:spPr>
+          <a:xfrm>
+            <a:off x="914400" y="5314950"/>
+            <a:ext cx="571500" cy="228600"/>
+          </a:xfrm>
+          <a:prstGeom prst="rect">
+            <a:avLst/>
+          </a:prstGeom>
+          <a:noFill/>
+        </p:spPr>
+        <p:txBody>
+          <a:bodyPr wrap="none" lIns="0" rIns="0" tIns="0" bIns="0" anchor="ctr">
+            <a:noAutofit/>
+          </a:bodyPr>
+          <a:lstStyle/>
+          <a:p>
+            <a:pPr algn="l">
+              <a:lnSpc>
+                <a:spcPts val="1170"/>
+              </a:lnSpc>
+              <a:spcAft>
+                <a:spcPts val="0"/>
+              </a:spcAft>
+            </a:pPr>
+            <a:r>
+              <a:rPr b="0" sz="900" spc="0" kern="0">
+                <a:solidFill>
+                  <a:srgbClr val="0066CC"/>
+                </a:solidFill>
+                <a:latin typeface="Pretendard SemiBold"/>
+                <a:cs typeface="Pretendard SemiBold"/>
+                <a:ea typeface="Pretendard SemiBold"/>
+              </a:rPr>
+              <a:t>07/16</a:t>
+            </a:r>
+          </a:p>
+        </p:txBody>
+      </p:sp>
+      <p:sp>
+        <p:nvSpPr>
+          <p:cNvPr id="45" name="TextBox 44"/>
+          <p:cNvSpPr txBox="1"/>
+          <p:nvPr/>
+        </p:nvSpPr>
+        <p:spPr>
+          <a:xfrm>
+            <a:off x="1562100" y="5314950"/>
+            <a:ext cx="4267200" cy="228600"/>
+          </a:xfrm>
+          <a:prstGeom prst="rect">
+            <a:avLst/>
+          </a:prstGeom>
+          <a:noFill/>
+        </p:spPr>
+        <p:txBody>
+          <a:bodyPr wrap="none" lIns="0" rIns="0" tIns="0" bIns="0" anchor="ctr">
+            <a:noAutofit/>
+          </a:bodyPr>
+          <a:lstStyle/>
+          <a:p>
+            <a:pPr algn="l">
+              <a:lnSpc>
+                <a:spcPts val="1170"/>
+              </a:lnSpc>
+              <a:spcAft>
+                <a:spcPts val="0"/>
+              </a:spcAft>
+            </a:pPr>
+            <a:r>
+              <a:rPr b="0" sz="900" spc="0" kern="0">
+                <a:solidFill>
+                  <a:srgbClr val="1D1D1F"/>
+                </a:solidFill>
+                <a:latin typeface="Pretendard SemiBold"/>
+                <a:cs typeface="Pretendard SemiBold"/>
+                <a:ea typeface="Pretendard SemiBold"/>
+              </a:rPr>
+              <a:t>★ 텔레옵 마일스톤 — 60초 오류 0건 · 평균 55.5Hz</a:t>
+            </a:r>
+          </a:p>
+        </p:txBody>
+      </p:sp>
+      <p:sp>
+        <p:nvSpPr>
+          <p:cNvPr id="46" name="TextBox 45"/>
+          <p:cNvSpPr txBox="1"/>
+          <p:nvPr/>
+        </p:nvSpPr>
+        <p:spPr>
+          <a:xfrm>
+            <a:off x="914400" y="5553075"/>
+            <a:ext cx="571500" cy="228600"/>
+          </a:xfrm>
+          <a:prstGeom prst="rect">
+            <a:avLst/>
+          </a:prstGeom>
+          <a:noFill/>
+        </p:spPr>
+        <p:txBody>
+          <a:bodyPr wrap="none" lIns="0" rIns="0" tIns="0" bIns="0" anchor="ctr">
+            <a:noAutofit/>
+          </a:bodyPr>
+          <a:lstStyle/>
+          <a:p>
+            <a:pPr algn="l">
+              <a:lnSpc>
+                <a:spcPts val="1170"/>
+              </a:lnSpc>
+              <a:spcAft>
+                <a:spcPts val="0"/>
+              </a:spcAft>
+            </a:pPr>
+            <a:r>
+              <a:rPr b="0" sz="900" spc="0" kern="0">
                 <a:solidFill>
                   <a:srgbClr val="7A7A7A"/>
+                </a:solidFill>
+                <a:latin typeface="Pretendard SemiBold"/>
+                <a:cs typeface="Pretendard SemiBold"/>
+                <a:ea typeface="Pretendard SemiBold"/>
+              </a:rPr>
+              <a:t>08/14</a:t>
+            </a:r>
+          </a:p>
+        </p:txBody>
+      </p:sp>
+      <p:sp>
+        <p:nvSpPr>
+          <p:cNvPr id="47" name="TextBox 46"/>
+          <p:cNvSpPr txBox="1"/>
+          <p:nvPr/>
+        </p:nvSpPr>
+        <p:spPr>
+          <a:xfrm>
+            <a:off x="1562100" y="5553075"/>
+            <a:ext cx="4267200" cy="228600"/>
+          </a:xfrm>
+          <a:prstGeom prst="rect">
+            <a:avLst/>
+          </a:prstGeom>
+          <a:noFill/>
+        </p:spPr>
+        <p:txBody>
+          <a:bodyPr wrap="none" lIns="0" rIns="0" tIns="0" bIns="0" anchor="ctr">
+            <a:noAutofit/>
+          </a:bodyPr>
+          <a:lstStyle/>
+          <a:p>
+            <a:pPr algn="l">
+              <a:lnSpc>
+                <a:spcPts val="1170"/>
+              </a:lnSpc>
+              <a:spcAft>
+                <a:spcPts val="0"/>
+              </a:spcAft>
+            </a:pPr>
+            <a:r>
+              <a:rPr b="0" sz="900" spc="0" kern="0">
+                <a:solidFill>
+                  <a:srgbClr val="333333"/>
                 </a:solidFill>
                 <a:latin typeface="Pretendard"/>
                 <a:cs typeface="Pretendard"/>
                 <a:ea typeface="Pretendard"/>
               </a:rPr>
-              <a:t>제출</a:t>
-            </a:r>
-          </a:p>
-        </p:txBody>
-      </p:sp>
-      <p:sp>
-        <p:nvSpPr>
-          <p:cNvPr id="39" name="TextBox 38"/>
+              <a:t>시연 공간 확보 · 세트 제작 완료</a:t>
+            </a:r>
+          </a:p>
+        </p:txBody>
+      </p:sp>
+      <p:sp>
+        <p:nvSpPr>
+          <p:cNvPr id="48" name="TextBox 47"/>
           <p:cNvSpPr txBox="1"/>
           <p:nvPr/>
         </p:nvSpPr>
         <p:spPr>
           <a:xfrm>
-            <a:off x="1943100" y="4152900"/>
-            <a:ext cx="3886200" cy="647700"/>
+            <a:off x="914400" y="5791200"/>
+            <a:ext cx="571500" cy="228600"/>
           </a:xfrm>
           <a:prstGeom prst="rect">
             <a:avLst/>
@@ -34153,21 +34547,153 @@
           <a:noFill/>
         </p:spPr>
         <p:txBody>
-          <a:bodyPr wrap="square" lIns="0" rIns="0" tIns="0" bIns="0" anchor="ctr">
+          <a:bodyPr wrap="none" lIns="0" rIns="0" tIns="0" bIns="0" anchor="ctr">
             <a:noAutofit/>
           </a:bodyPr>
           <a:lstStyle/>
           <a:p>
             <a:pPr algn="l">
               <a:lnSpc>
-                <a:spcPts val="1237"/>
-              </a:lnSpc>
-              <a:spcAft>
-                <a:spcPts val="0"/>
-              </a:spcAft>
-            </a:pPr>
-            <a:r>
-              <a:rPr b="0" sz="825" spc="0" kern="0">
+                <a:spcPts val="1170"/>
+              </a:lnSpc>
+              <a:spcAft>
+                <a:spcPts val="0"/>
+              </a:spcAft>
+            </a:pPr>
+            <a:r>
+              <a:rPr b="0" sz="900" spc="0" kern="0">
+                <a:solidFill>
+                  <a:srgbClr val="0066CC"/>
+                </a:solidFill>
+                <a:latin typeface="Pretendard SemiBold"/>
+                <a:cs typeface="Pretendard SemiBold"/>
+                <a:ea typeface="Pretendard SemiBold"/>
+              </a:rPr>
+              <a:t>08/26</a:t>
+            </a:r>
+          </a:p>
+        </p:txBody>
+      </p:sp>
+      <p:sp>
+        <p:nvSpPr>
+          <p:cNvPr id="49" name="TextBox 48"/>
+          <p:cNvSpPr txBox="1"/>
+          <p:nvPr/>
+        </p:nvSpPr>
+        <p:spPr>
+          <a:xfrm>
+            <a:off x="1562100" y="5791200"/>
+            <a:ext cx="4267200" cy="228600"/>
+          </a:xfrm>
+          <a:prstGeom prst="rect">
+            <a:avLst/>
+          </a:prstGeom>
+          <a:noFill/>
+        </p:spPr>
+        <p:txBody>
+          <a:bodyPr wrap="none" lIns="0" rIns="0" tIns="0" bIns="0" anchor="ctr">
+            <a:noAutofit/>
+          </a:bodyPr>
+          <a:lstStyle/>
+          <a:p>
+            <a:pPr algn="l">
+              <a:lnSpc>
+                <a:spcPts val="1170"/>
+              </a:lnSpc>
+              <a:spcAft>
+                <a:spcPts val="0"/>
+              </a:spcAft>
+            </a:pPr>
+            <a:r>
+              <a:rPr b="0" sz="900" spc="0" kern="0">
+                <a:solidFill>
+                  <a:srgbClr val="1D1D1F"/>
+                </a:solidFill>
+                <a:latin typeface="Pretendard SemiBold"/>
+                <a:cs typeface="Pretendard SemiBold"/>
+                <a:ea typeface="Pretendard SemiBold"/>
+              </a:rPr>
+              <a:t>★ ACT 학습 완료 — 100,000 스텝</a:t>
+            </a:r>
+          </a:p>
+        </p:txBody>
+      </p:sp>
+      <p:sp>
+        <p:nvSpPr>
+          <p:cNvPr id="50" name="TextBox 49"/>
+          <p:cNvSpPr txBox="1"/>
+          <p:nvPr/>
+        </p:nvSpPr>
+        <p:spPr>
+          <a:xfrm>
+            <a:off x="914400" y="6029325"/>
+            <a:ext cx="571500" cy="228600"/>
+          </a:xfrm>
+          <a:prstGeom prst="rect">
+            <a:avLst/>
+          </a:prstGeom>
+          <a:noFill/>
+        </p:spPr>
+        <p:txBody>
+          <a:bodyPr wrap="none" lIns="0" rIns="0" tIns="0" bIns="0" anchor="ctr">
+            <a:noAutofit/>
+          </a:bodyPr>
+          <a:lstStyle/>
+          <a:p>
+            <a:pPr algn="l">
+              <a:lnSpc>
+                <a:spcPts val="1170"/>
+              </a:lnSpc>
+              <a:spcAft>
+                <a:spcPts val="0"/>
+              </a:spcAft>
+            </a:pPr>
+            <a:r>
+              <a:rPr b="0" sz="900" spc="0" kern="0">
+                <a:solidFill>
+                  <a:srgbClr val="7A7A7A"/>
+                </a:solidFill>
+                <a:latin typeface="Pretendard SemiBold"/>
+                <a:cs typeface="Pretendard SemiBold"/>
+                <a:ea typeface="Pretendard SemiBold"/>
+              </a:rPr>
+              <a:t>09/03</a:t>
+            </a:r>
+          </a:p>
+        </p:txBody>
+      </p:sp>
+      <p:sp>
+        <p:nvSpPr>
+          <p:cNvPr id="51" name="TextBox 50"/>
+          <p:cNvSpPr txBox="1"/>
+          <p:nvPr/>
+        </p:nvSpPr>
+        <p:spPr>
+          <a:xfrm>
+            <a:off x="1562100" y="6029325"/>
+            <a:ext cx="4267200" cy="228600"/>
+          </a:xfrm>
+          <a:prstGeom prst="rect">
+            <a:avLst/>
+          </a:prstGeom>
+          <a:noFill/>
+        </p:spPr>
+        <p:txBody>
+          <a:bodyPr wrap="none" lIns="0" rIns="0" tIns="0" bIns="0" anchor="ctr">
+            <a:noAutofit/>
+          </a:bodyPr>
+          <a:lstStyle/>
+          <a:p>
+            <a:pPr algn="l">
+              <a:lnSpc>
+                <a:spcPts val="1170"/>
+              </a:lnSpc>
+              <a:spcAft>
+                <a:spcPts val="0"/>
+              </a:spcAft>
+            </a:pPr>
+            <a:r>
+              <a:rPr b="0" sz="900" spc="0" kern="0">
                 <a:solidFill>
                   <a:srgbClr val="333333"/>
                 </a:solidFill>
@@ -34175,452 +34701,14 @@
                 <a:cs typeface="Pretendard"/>
                 <a:ea typeface="Pretendard"/>
               </a:rPr>
-              <a:t>개발완료보고서 · 시연동영상 · 소스코드 저장소 정리</a:t>
-            </a:r>
-          </a:p>
-        </p:txBody>
-      </p:sp>
-      <p:sp>
-        <p:nvSpPr>
-          <p:cNvPr id="40" name="Rectangle 39"/>
-          <p:cNvSpPr/>
-          <p:nvPr/>
-        </p:nvSpPr>
-        <p:spPr>
-          <a:xfrm>
-            <a:off x="914400" y="4838700"/>
-            <a:ext cx="4914900" cy="9525"/>
-          </a:xfrm>
-          <a:prstGeom prst="rect">
-            <a:avLst/>
-          </a:prstGeom>
-          <a:solidFill>
-            <a:srgbClr val="E0E0E0"/>
-          </a:solidFill>
-          <a:ln>
-            <a:noFill/>
-          </a:ln>
-          <a:effectLst/>
-        </p:spPr>
-        <p:style>
-          <a:lnRef idx="1">
-            <a:schemeClr val="accent1"/>
-          </a:lnRef>
-          <a:fillRef idx="3">
-            <a:schemeClr val="accent1"/>
-          </a:fillRef>
-          <a:effectRef idx="2">
-            <a:schemeClr val="accent1"/>
-          </a:effectRef>
-          <a:fontRef idx="minor">
-            <a:schemeClr val="lt1"/>
-          </a:fontRef>
-        </p:style>
-        <p:txBody>
-          <a:bodyPr rtlCol="0" anchor="ctr"/>
-          <a:lstStyle/>
-          <a:p/>
-        </p:txBody>
-      </p:sp>
-      <p:sp>
-        <p:nvSpPr>
-          <p:cNvPr id="41" name="TextBox 40"/>
-          <p:cNvSpPr txBox="1"/>
-          <p:nvPr/>
-        </p:nvSpPr>
-        <p:spPr>
-          <a:xfrm>
-            <a:off x="914400" y="4953000"/>
-            <a:ext cx="4914900" cy="165735"/>
-          </a:xfrm>
-          <a:prstGeom prst="rect">
-            <a:avLst/>
-          </a:prstGeom>
-          <a:noFill/>
-        </p:spPr>
-        <p:txBody>
-          <a:bodyPr wrap="none" lIns="0" rIns="0" tIns="0" bIns="0" anchor="t">
-            <a:noAutofit/>
-          </a:bodyPr>
-          <a:lstStyle/>
-          <a:p>
-            <a:pPr algn="l">
-              <a:lnSpc>
-                <a:spcPts val="1155"/>
-              </a:lnSpc>
-              <a:spcAft>
-                <a:spcPts val="0"/>
-              </a:spcAft>
-            </a:pPr>
-            <a:r>
-              <a:rPr b="0" sz="825" spc="50" kern="0">
-                <a:solidFill>
-                  <a:srgbClr val="7A7A7A"/>
-                </a:solidFill>
-                <a:latin typeface="Pretendard SemiBold"/>
-                <a:cs typeface="Pretendard SemiBold"/>
-                <a:ea typeface="Pretendard SemiBold"/>
-              </a:rPr>
-              <a:t>마일스톤</a:t>
-            </a:r>
-          </a:p>
-        </p:txBody>
-      </p:sp>
-      <p:sp>
-        <p:nvSpPr>
-          <p:cNvPr id="42" name="TextBox 41"/>
-          <p:cNvSpPr txBox="1"/>
-          <p:nvPr/>
-        </p:nvSpPr>
-        <p:spPr>
-          <a:xfrm>
-            <a:off x="914400" y="5181600"/>
-            <a:ext cx="571500" cy="228600"/>
-          </a:xfrm>
-          <a:prstGeom prst="rect">
-            <a:avLst/>
-          </a:prstGeom>
-          <a:noFill/>
-        </p:spPr>
-        <p:txBody>
-          <a:bodyPr wrap="none" lIns="0" rIns="0" tIns="0" bIns="0" anchor="ctr">
-            <a:noAutofit/>
-          </a:bodyPr>
-          <a:lstStyle/>
-          <a:p>
-            <a:pPr algn="l">
-              <a:lnSpc>
-                <a:spcPts val="1170"/>
-              </a:lnSpc>
-              <a:spcAft>
-                <a:spcPts val="0"/>
-              </a:spcAft>
-            </a:pPr>
-            <a:r>
-              <a:rPr b="0" sz="900" spc="0" kern="0">
-                <a:solidFill>
-                  <a:srgbClr val="7A7A7A"/>
-                </a:solidFill>
-                <a:latin typeface="Pretendard SemiBold"/>
-                <a:cs typeface="Pretendard SemiBold"/>
-                <a:ea typeface="Pretendard SemiBold"/>
-              </a:rPr>
-              <a:t>07/11</a:t>
-            </a:r>
-          </a:p>
-        </p:txBody>
-      </p:sp>
-      <p:sp>
-        <p:nvSpPr>
-          <p:cNvPr id="43" name="TextBox 42"/>
-          <p:cNvSpPr txBox="1"/>
-          <p:nvPr/>
-        </p:nvSpPr>
-        <p:spPr>
-          <a:xfrm>
-            <a:off x="1562100" y="5181600"/>
-            <a:ext cx="4267200" cy="228600"/>
-          </a:xfrm>
-          <a:prstGeom prst="rect">
-            <a:avLst/>
-          </a:prstGeom>
-          <a:noFill/>
-        </p:spPr>
-        <p:txBody>
-          <a:bodyPr wrap="none" lIns="0" rIns="0" tIns="0" bIns="0" anchor="ctr">
-            <a:noAutofit/>
-          </a:bodyPr>
-          <a:lstStyle/>
-          <a:p>
-            <a:pPr algn="l">
-              <a:lnSpc>
-                <a:spcPts val="1170"/>
-              </a:lnSpc>
-              <a:spcAft>
-                <a:spcPts val="0"/>
-              </a:spcAft>
-            </a:pPr>
-            <a:r>
-              <a:rPr b="0" sz="900" spc="0" kern="0">
-                <a:solidFill>
-                  <a:srgbClr val="333333"/>
-                </a:solidFill>
-                <a:latin typeface="Pretendard"/>
-                <a:cs typeface="Pretendard"/>
-                <a:ea typeface="Pretendard"/>
-              </a:rPr>
-              <a:t>캘리브레이션 정본 4종 확정</a:t>
-            </a:r>
-          </a:p>
-        </p:txBody>
-      </p:sp>
-      <p:sp>
-        <p:nvSpPr>
-          <p:cNvPr id="44" name="TextBox 43"/>
-          <p:cNvSpPr txBox="1"/>
-          <p:nvPr/>
-        </p:nvSpPr>
-        <p:spPr>
-          <a:xfrm>
-            <a:off x="914400" y="5429250"/>
-            <a:ext cx="571500" cy="228600"/>
-          </a:xfrm>
-          <a:prstGeom prst="rect">
-            <a:avLst/>
-          </a:prstGeom>
-          <a:noFill/>
-        </p:spPr>
-        <p:txBody>
-          <a:bodyPr wrap="none" lIns="0" rIns="0" tIns="0" bIns="0" anchor="ctr">
-            <a:noAutofit/>
-          </a:bodyPr>
-          <a:lstStyle/>
-          <a:p>
-            <a:pPr algn="l">
-              <a:lnSpc>
-                <a:spcPts val="1170"/>
-              </a:lnSpc>
-              <a:spcAft>
-                <a:spcPts val="0"/>
-              </a:spcAft>
-            </a:pPr>
-            <a:r>
-              <a:rPr b="0" sz="900" spc="0" kern="0">
-                <a:solidFill>
-                  <a:srgbClr val="0066CC"/>
-                </a:solidFill>
-                <a:latin typeface="Pretendard SemiBold"/>
-                <a:cs typeface="Pretendard SemiBold"/>
-                <a:ea typeface="Pretendard SemiBold"/>
-              </a:rPr>
-              <a:t>07/16</a:t>
-            </a:r>
-          </a:p>
-        </p:txBody>
-      </p:sp>
-      <p:sp>
-        <p:nvSpPr>
-          <p:cNvPr id="45" name="TextBox 44"/>
-          <p:cNvSpPr txBox="1"/>
-          <p:nvPr/>
-        </p:nvSpPr>
-        <p:spPr>
-          <a:xfrm>
-            <a:off x="1562100" y="5429250"/>
-            <a:ext cx="4267200" cy="228600"/>
-          </a:xfrm>
-          <a:prstGeom prst="rect">
-            <a:avLst/>
-          </a:prstGeom>
-          <a:noFill/>
-        </p:spPr>
-        <p:txBody>
-          <a:bodyPr wrap="none" lIns="0" rIns="0" tIns="0" bIns="0" anchor="ctr">
-            <a:noAutofit/>
-          </a:bodyPr>
-          <a:lstStyle/>
-          <a:p>
-            <a:pPr algn="l">
-              <a:lnSpc>
-                <a:spcPts val="1170"/>
-              </a:lnSpc>
-              <a:spcAft>
-                <a:spcPts val="0"/>
-              </a:spcAft>
-            </a:pPr>
-            <a:r>
-              <a:rPr b="0" sz="900" spc="0" kern="0">
-                <a:solidFill>
-                  <a:srgbClr val="1D1D1F"/>
-                </a:solidFill>
-                <a:latin typeface="Pretendard SemiBold"/>
-                <a:cs typeface="Pretendard SemiBold"/>
-                <a:ea typeface="Pretendard SemiBold"/>
-              </a:rPr>
-              <a:t>★ 텔레옵 마일스톤 — 60초 오류 0건 · 평균 55.5Hz</a:t>
-            </a:r>
-          </a:p>
-        </p:txBody>
-      </p:sp>
-      <p:sp>
-        <p:nvSpPr>
-          <p:cNvPr id="46" name="TextBox 45"/>
-          <p:cNvSpPr txBox="1"/>
-          <p:nvPr/>
-        </p:nvSpPr>
-        <p:spPr>
-          <a:xfrm>
-            <a:off x="914400" y="5676900"/>
-            <a:ext cx="571500" cy="228600"/>
-          </a:xfrm>
-          <a:prstGeom prst="rect">
-            <a:avLst/>
-          </a:prstGeom>
-          <a:noFill/>
-        </p:spPr>
-        <p:txBody>
-          <a:bodyPr wrap="none" lIns="0" rIns="0" tIns="0" bIns="0" anchor="ctr">
-            <a:noAutofit/>
-          </a:bodyPr>
-          <a:lstStyle/>
-          <a:p>
-            <a:pPr algn="l">
-              <a:lnSpc>
-                <a:spcPts val="1170"/>
-              </a:lnSpc>
-              <a:spcAft>
-                <a:spcPts val="0"/>
-              </a:spcAft>
-            </a:pPr>
-            <a:r>
-              <a:rPr b="0" sz="900" spc="0" kern="0">
-                <a:solidFill>
-                  <a:srgbClr val="7A7A7A"/>
-                </a:solidFill>
-                <a:latin typeface="Pretendard SemiBold"/>
-                <a:cs typeface="Pretendard SemiBold"/>
-                <a:ea typeface="Pretendard SemiBold"/>
-              </a:rPr>
-              <a:t>08/14</a:t>
-            </a:r>
-          </a:p>
-        </p:txBody>
-      </p:sp>
-      <p:sp>
-        <p:nvSpPr>
-          <p:cNvPr id="47" name="TextBox 46"/>
-          <p:cNvSpPr txBox="1"/>
-          <p:nvPr/>
-        </p:nvSpPr>
-        <p:spPr>
-          <a:xfrm>
-            <a:off x="1562100" y="5676900"/>
-            <a:ext cx="4267200" cy="228600"/>
-          </a:xfrm>
-          <a:prstGeom prst="rect">
-            <a:avLst/>
-          </a:prstGeom>
-          <a:noFill/>
-        </p:spPr>
-        <p:txBody>
-          <a:bodyPr wrap="none" lIns="0" rIns="0" tIns="0" bIns="0" anchor="ctr">
-            <a:noAutofit/>
-          </a:bodyPr>
-          <a:lstStyle/>
-          <a:p>
-            <a:pPr algn="l">
-              <a:lnSpc>
-                <a:spcPts val="1170"/>
-              </a:lnSpc>
-              <a:spcAft>
-                <a:spcPts val="0"/>
-              </a:spcAft>
-            </a:pPr>
-            <a:r>
-              <a:rPr b="0" sz="900" spc="0" kern="0">
-                <a:solidFill>
-                  <a:srgbClr val="333333"/>
-                </a:solidFill>
-                <a:latin typeface="Pretendard"/>
-                <a:cs typeface="Pretendard"/>
-                <a:ea typeface="Pretendard"/>
-              </a:rPr>
-              <a:t>시연 공간 확보 · 세트 제작 완료</a:t>
-            </a:r>
-          </a:p>
-        </p:txBody>
-      </p:sp>
-      <p:sp>
-        <p:nvSpPr>
-          <p:cNvPr id="48" name="TextBox 47"/>
-          <p:cNvSpPr txBox="1"/>
-          <p:nvPr/>
-        </p:nvSpPr>
-        <p:spPr>
-          <a:xfrm>
-            <a:off x="914400" y="5924550"/>
-            <a:ext cx="571500" cy="228600"/>
-          </a:xfrm>
-          <a:prstGeom prst="rect">
-            <a:avLst/>
-          </a:prstGeom>
-          <a:noFill/>
-        </p:spPr>
-        <p:txBody>
-          <a:bodyPr wrap="none" lIns="0" rIns="0" tIns="0" bIns="0" anchor="ctr">
-            <a:noAutofit/>
-          </a:bodyPr>
-          <a:lstStyle/>
-          <a:p>
-            <a:pPr algn="l">
-              <a:lnSpc>
-                <a:spcPts val="1170"/>
-              </a:lnSpc>
-              <a:spcAft>
-                <a:spcPts val="0"/>
-              </a:spcAft>
-            </a:pPr>
-            <a:r>
-              <a:rPr b="0" sz="900" spc="0" kern="0">
-                <a:solidFill>
-                  <a:srgbClr val="0066CC"/>
-                </a:solidFill>
-                <a:latin typeface="Pretendard SemiBold"/>
-                <a:cs typeface="Pretendard SemiBold"/>
-                <a:ea typeface="Pretendard SemiBold"/>
-              </a:rPr>
-              <a:t>08/26</a:t>
-            </a:r>
-          </a:p>
-        </p:txBody>
-      </p:sp>
-      <p:sp>
-        <p:nvSpPr>
-          <p:cNvPr id="49" name="TextBox 48"/>
-          <p:cNvSpPr txBox="1"/>
-          <p:nvPr/>
-        </p:nvSpPr>
-        <p:spPr>
-          <a:xfrm>
-            <a:off x="1562100" y="5924550"/>
-            <a:ext cx="4267200" cy="228600"/>
-          </a:xfrm>
-          <a:prstGeom prst="rect">
-            <a:avLst/>
-          </a:prstGeom>
-          <a:noFill/>
-        </p:spPr>
-        <p:txBody>
-          <a:bodyPr wrap="none" lIns="0" rIns="0" tIns="0" bIns="0" anchor="ctr">
-            <a:noAutofit/>
-          </a:bodyPr>
-          <a:lstStyle/>
-          <a:p>
-            <a:pPr algn="l">
-              <a:lnSpc>
-                <a:spcPts val="1170"/>
-              </a:lnSpc>
-              <a:spcAft>
-                <a:spcPts val="0"/>
-              </a:spcAft>
-            </a:pPr>
-            <a:r>
-              <a:rPr b="0" sz="900" spc="0" kern="0">
-                <a:solidFill>
-                  <a:srgbClr val="1D1D1F"/>
-                </a:solidFill>
-                <a:latin typeface="Pretendard SemiBold"/>
-                <a:cs typeface="Pretendard SemiBold"/>
-                <a:ea typeface="Pretendard SemiBold"/>
-              </a:rPr>
-              <a:t>★ ACT 학습 완료 — 100,000 스텝</a:t>
-            </a:r>
-          </a:p>
-        </p:txBody>
-      </p:sp>
-      <p:sp>
-        <p:nvSpPr>
-          <p:cNvPr id="50" name="Rounded Rectangle 49"/>
+              <a:t>저장소 정본화 — 추적 파일 259개 · ENV 펌웨어 반입</a:t>
+            </a:r>
+          </a:p>
+        </p:txBody>
+      </p:sp>
+      <p:sp>
+        <p:nvSpPr>
+          <p:cNvPr id="52" name="Rounded Rectangle 51"/>
           <p:cNvSpPr/>
           <p:nvPr/>
         </p:nvSpPr>
@@ -34666,7 +34754,7 @@
       </p:sp>
       <p:sp>
         <p:nvSpPr>
-          <p:cNvPr id="51" name="TextBox 50"/>
+          <p:cNvPr id="53" name="TextBox 52"/>
           <p:cNvSpPr txBox="1"/>
           <p:nvPr/>
         </p:nvSpPr>
@@ -34710,7 +34798,7 @@
       </p:sp>
       <p:sp>
         <p:nvSpPr>
-          <p:cNvPr id="52" name="Rounded Rectangle 51"/>
+          <p:cNvPr id="54" name="Rounded Rectangle 53"/>
           <p:cNvSpPr/>
           <p:nvPr/>
         </p:nvSpPr>
@@ -34754,7 +34842,7 @@
       </p:sp>
       <p:sp>
         <p:nvSpPr>
-          <p:cNvPr id="53" name="TextBox 52"/>
+          <p:cNvPr id="55" name="TextBox 54"/>
           <p:cNvSpPr txBox="1"/>
           <p:nvPr/>
         </p:nvSpPr>
@@ -34798,7 +34886,7 @@
       </p:sp>
       <p:sp>
         <p:nvSpPr>
-          <p:cNvPr id="54" name="TextBox 53"/>
+          <p:cNvPr id="56" name="TextBox 55"/>
           <p:cNvSpPr txBox="1"/>
           <p:nvPr/>
         </p:nvSpPr>
@@ -34842,7 +34930,7 @@
       </p:sp>
       <p:sp>
         <p:nvSpPr>
-          <p:cNvPr id="55" name="TextBox 54"/>
+          <p:cNvPr id="57" name="TextBox 56"/>
           <p:cNvSpPr txBox="1"/>
           <p:nvPr/>
         </p:nvSpPr>
@@ -34910,7 +34998,7 @@
       </p:sp>
       <p:sp>
         <p:nvSpPr>
-          <p:cNvPr id="56" name="Rectangle 55"/>
+          <p:cNvPr id="58" name="Rectangle 57"/>
           <p:cNvSpPr/>
           <p:nvPr/>
         </p:nvSpPr>
@@ -34952,7 +35040,7 @@
       </p:sp>
       <p:sp>
         <p:nvSpPr>
-          <p:cNvPr id="57" name="Rounded Rectangle 56"/>
+          <p:cNvPr id="59" name="Rounded Rectangle 58"/>
           <p:cNvSpPr/>
           <p:nvPr/>
         </p:nvSpPr>
@@ -34996,7 +35084,7 @@
       </p:sp>
       <p:sp>
         <p:nvSpPr>
-          <p:cNvPr id="58" name="TextBox 57"/>
+          <p:cNvPr id="60" name="TextBox 59"/>
           <p:cNvSpPr txBox="1"/>
           <p:nvPr/>
         </p:nvSpPr>
@@ -35040,7 +35128,7 @@
       </p:sp>
       <p:sp>
         <p:nvSpPr>
-          <p:cNvPr id="59" name="TextBox 58"/>
+          <p:cNvPr id="61" name="TextBox 60"/>
           <p:cNvSpPr txBox="1"/>
           <p:nvPr/>
         </p:nvSpPr>
@@ -35084,7 +35172,7 @@
       </p:sp>
       <p:sp>
         <p:nvSpPr>
-          <p:cNvPr id="60" name="TextBox 59"/>
+          <p:cNvPr id="62" name="TextBox 61"/>
           <p:cNvSpPr txBox="1"/>
           <p:nvPr/>
         </p:nvSpPr>
@@ -35152,7 +35240,7 @@
       </p:sp>
       <p:sp>
         <p:nvSpPr>
-          <p:cNvPr id="61" name="Rectangle 60"/>
+          <p:cNvPr id="63" name="Rectangle 62"/>
           <p:cNvSpPr/>
           <p:nvPr/>
         </p:nvSpPr>
@@ -35194,7 +35282,7 @@
       </p:sp>
       <p:sp>
         <p:nvSpPr>
-          <p:cNvPr id="62" name="Rounded Rectangle 61"/>
+          <p:cNvPr id="64" name="Rounded Rectangle 63"/>
           <p:cNvSpPr/>
           <p:nvPr/>
         </p:nvSpPr>
@@ -35238,7 +35326,7 @@
       </p:sp>
       <p:sp>
         <p:nvSpPr>
-          <p:cNvPr id="63" name="TextBox 62"/>
+          <p:cNvPr id="65" name="TextBox 64"/>
           <p:cNvSpPr txBox="1"/>
           <p:nvPr/>
         </p:nvSpPr>
@@ -35282,7 +35370,7 @@
       </p:sp>
       <p:sp>
         <p:nvSpPr>
-          <p:cNvPr id="64" name="TextBox 63"/>
+          <p:cNvPr id="66" name="TextBox 65"/>
           <p:cNvSpPr txBox="1"/>
           <p:nvPr/>
         </p:nvSpPr>
@@ -35326,7 +35414,7 @@
       </p:sp>
       <p:sp>
         <p:nvSpPr>
-          <p:cNvPr id="65" name="TextBox 64"/>
+          <p:cNvPr id="67" name="TextBox 66"/>
           <p:cNvSpPr txBox="1"/>
           <p:nvPr/>
         </p:nvSpPr>
